--- a/ppt/2026-10-05.pptx
+++ b/ppt/2026-10-05.pptx
@@ -3946,7 +3946,7 @@
               </a:defRPr>
             </a:pPr>
             <a:r>
-              <a:t>🔴 安森美第二轮涨价本周五（10-10）生效，功率器件涨价链延续至 2027（热度 92）</a:t>
+              <a:t>🔴 安森美第二轮涨价本周六（10-10）生效，功率器件涨价链延续至 2027（热度 92）</a:t>
             </a:r>
           </a:p>
           <a:p>
